--- a/Medical_Charges_Presentation.pptx
+++ b/Medical_Charges_Presentation.pptx
@@ -178,7 +178,7 @@
   <pc:docChgLst>
     <pc:chgData name="Khethiwe Dlamini" userId="2bf6d97d3a4d60df" providerId="LiveId" clId="{9FC59950-DFEB-445E-8864-062B647CD92D}"/>
     <pc:docChg chg="undo custSel addSld delSld modSld">
-      <pc:chgData name="Khethiwe Dlamini" userId="2bf6d97d3a4d60df" providerId="LiveId" clId="{9FC59950-DFEB-445E-8864-062B647CD92D}" dt="2026-02-25T17:07:17.434" v="4557" actId="20577"/>
+      <pc:chgData name="Khethiwe Dlamini" userId="2bf6d97d3a4d60df" providerId="LiveId" clId="{9FC59950-DFEB-445E-8864-062B647CD92D}" dt="2026-02-26T09:27:19.516" v="4619" actId="20577"/>
       <pc:docMkLst>
         <pc:docMk/>
       </pc:docMkLst>
@@ -411,7 +411,7 @@
         </pc:sldMkLst>
       </pc:sldChg>
       <pc:sldChg chg="addSp delSp modSp mod modNotesTx">
-        <pc:chgData name="Khethiwe Dlamini" userId="2bf6d97d3a4d60df" providerId="LiveId" clId="{9FC59950-DFEB-445E-8864-062B647CD92D}" dt="2026-02-25T16:53:32.628" v="3977" actId="14100"/>
+        <pc:chgData name="Khethiwe Dlamini" userId="2bf6d97d3a4d60df" providerId="LiveId" clId="{9FC59950-DFEB-445E-8864-062B647CD92D}" dt="2026-02-26T09:27:19.516" v="4619" actId="20577"/>
         <pc:sldMkLst>
           <pc:docMk/>
           <pc:sldMk cId="2044100319" sldId="261"/>
@@ -457,7 +457,7 @@
           </ac:spMkLst>
         </pc:spChg>
         <pc:spChg chg="add mod">
-          <ac:chgData name="Khethiwe Dlamini" userId="2bf6d97d3a4d60df" providerId="LiveId" clId="{9FC59950-DFEB-445E-8864-062B647CD92D}" dt="2026-02-25T16:53:32.628" v="3977" actId="14100"/>
+          <ac:chgData name="Khethiwe Dlamini" userId="2bf6d97d3a4d60df" providerId="LiveId" clId="{9FC59950-DFEB-445E-8864-062B647CD92D}" dt="2026-02-26T09:27:19.516" v="4619" actId="20577"/>
           <ac:spMkLst>
             <pc:docMk/>
             <pc:sldMk cId="2044100319" sldId="261"/>
@@ -1090,7 +1090,7 @@
           <a:p>
             <a:fld id="{24EEDC24-AEF3-4156-91F4-FB474A5F24DB}" type="datetimeFigureOut">
               <a:rPr lang="en-US" smtClean="0"/>
-              <a:t>2/25/2026</a:t>
+              <a:t>2/26/2026</a:t>
             </a:fld>
             <a:endParaRPr lang="en-US" dirty="0"/>
           </a:p>
@@ -1267,7 +1267,7 @@
           <a:p>
             <a:fld id="{253023A0-2B54-4E79-AA20-143385AB9A6C}" type="datetimeFigureOut">
               <a:rPr lang="en-US" smtClean="0"/>
-              <a:t>2/25/2026</a:t>
+              <a:t>2/26/2026</a:t>
             </a:fld>
             <a:endParaRPr lang="en-US" dirty="0"/>
           </a:p>
@@ -7613,7 +7613,23 @@
                   <a:srgbClr val="003300"/>
                 </a:solidFill>
               </a:rPr>
-              <a:t>Given the high quality of the data, preprocessing was not required</a:t>
+              <a:t>Given the high quality of the data, the only preprocessing required </a:t>
+            </a:r>
+            <a:r>
+              <a:rPr lang="en-GB" sz="1400">
+                <a:solidFill>
+                  <a:srgbClr val="003300"/>
+                </a:solidFill>
+              </a:rPr>
+              <a:t>was one-hot </a:t>
+            </a:r>
+            <a:r>
+              <a:rPr lang="en-GB" sz="1400" dirty="0">
+                <a:solidFill>
+                  <a:srgbClr val="003300"/>
+                </a:solidFill>
+              </a:rPr>
+              <a:t>encoding categorical variables</a:t>
             </a:r>
           </a:p>
           <a:p>
@@ -14342,6 +14358,23 @@
 </file>
 
 <file path=customXml/item1.xml><?xml version="1.0" encoding="utf-8"?>
+<?mso-contentType ?>
+<FormTemplates xmlns="http://schemas.microsoft.com/sharepoint/v3/contenttype/forms">
+  <Display>DocumentLibraryForm</Display>
+  <Edit>DocumentLibraryForm</Edit>
+  <New>DocumentLibraryForm</New>
+</FormTemplates>
+</file>
+
+<file path=customXml/item2.xml><?xml version="1.0" encoding="utf-8"?>
+<p:properties xmlns:p="http://schemas.microsoft.com/office/2006/metadata/properties" xmlns:xsi="http://www.w3.org/2001/XMLSchema-instance" xmlns:pc="http://schemas.microsoft.com/office/infopath/2007/PartnerControls">
+  <documentManagement>
+    <MediaServiceKeyPoints xmlns="71af3243-3dd4-4a8d-8c0d-dd76da1f02a5" xsi:nil="true"/>
+  </documentManagement>
+</p:properties>
+</file>
+
+<file path=customXml/item3.xml><?xml version="1.0" encoding="utf-8"?>
 <ct:contentTypeSchema xmlns:ct="http://schemas.microsoft.com/office/2006/metadata/contentType" xmlns:ma="http://schemas.microsoft.com/office/2006/metadata/properties/metaAttributes" ct:_="" ma:_="" ma:contentTypeName="Document" ma:contentTypeID="0x01010079F111ED35F8CC479449609E8A0923A6" ma:contentTypeVersion="11" ma:contentTypeDescription="Create a new document." ma:contentTypeScope="" ma:versionID="9677210f24a1be23c92c90fd886aa0aa">
   <xsd:schema xmlns:xsd="http://www.w3.org/2001/XMLSchema" xmlns:xs="http://www.w3.org/2001/XMLSchema" xmlns:p="http://schemas.microsoft.com/office/2006/metadata/properties" xmlns:ns2="71af3243-3dd4-4a8d-8c0d-dd76da1f02a5" xmlns:ns3="16c05727-aa75-4e4a-9b5f-8a80a1165891" targetNamespace="http://schemas.microsoft.com/office/2006/metadata/properties" ma:root="true" ma:fieldsID="60e05723c5c1908df1a1a4ebf11d344e" ns2:_="" ns3:_="">
     <xsd:import namespace="71af3243-3dd4-4a8d-8c0d-dd76da1f02a5"/>
@@ -14552,24 +14585,25 @@
 </ct:contentTypeSchema>
 </file>
 
-<file path=customXml/item2.xml><?xml version="1.0" encoding="utf-8"?>
-<p:properties xmlns:p="http://schemas.microsoft.com/office/2006/metadata/properties" xmlns:xsi="http://www.w3.org/2001/XMLSchema-instance" xmlns:pc="http://schemas.microsoft.com/office/infopath/2007/PartnerControls">
-  <documentManagement>
-    <MediaServiceKeyPoints xmlns="71af3243-3dd4-4a8d-8c0d-dd76da1f02a5" xsi:nil="true"/>
-  </documentManagement>
-</p:properties>
+<file path=customXml/itemProps1.xml><?xml version="1.0" encoding="utf-8"?>
+<ds:datastoreItem xmlns:ds="http://schemas.openxmlformats.org/officeDocument/2006/customXml" ds:itemID="{661A1251-DA89-493A-8204-679220DD13D9}">
+  <ds:schemaRefs>
+    <ds:schemaRef ds:uri="http://schemas.microsoft.com/sharepoint/v3/contenttype/forms"/>
+  </ds:schemaRefs>
+</ds:datastoreItem>
 </file>
 
-<file path=customXml/item3.xml><?xml version="1.0" encoding="utf-8"?>
-<?mso-contentType ?>
-<FormTemplates xmlns="http://schemas.microsoft.com/sharepoint/v3/contenttype/forms">
-  <Display>DocumentLibraryForm</Display>
-  <Edit>DocumentLibraryForm</Edit>
-  <New>DocumentLibraryForm</New>
-</FormTemplates>
+<file path=customXml/itemProps2.xml><?xml version="1.0" encoding="utf-8"?>
+<ds:datastoreItem xmlns:ds="http://schemas.openxmlformats.org/officeDocument/2006/customXml" ds:itemID="{33EC375F-F377-4CDC-ADF0-CC8811D177D6}">
+  <ds:schemaRefs>
+    <ds:schemaRef ds:uri="http://schemas.microsoft.com/office/2006/metadata/properties"/>
+    <ds:schemaRef ds:uri="http://schemas.microsoft.com/office/infopath/2007/PartnerControls"/>
+    <ds:schemaRef ds:uri="71af3243-3dd4-4a8d-8c0d-dd76da1f02a5"/>
+  </ds:schemaRefs>
+</ds:datastoreItem>
 </file>
 
-<file path=customXml/itemProps1.xml><?xml version="1.0" encoding="utf-8"?>
+<file path=customXml/itemProps3.xml><?xml version="1.0" encoding="utf-8"?>
 <ds:datastoreItem xmlns:ds="http://schemas.openxmlformats.org/officeDocument/2006/customXml" ds:itemID="{D1B0ABC2-BF39-4F70-A7AD-9DFBD1D27268}">
   <ds:schemaRefs>
     <ds:schemaRef ds:uri="http://schemas.microsoft.com/office/2006/metadata/contentType"/>
@@ -14586,22 +14620,4 @@
     <ds:schemaRef ds:uri="http://schemas.microsoft.com/internal/obd"/>
   </ds:schemaRefs>
 </ds:datastoreItem>
-</file>
-
-<file path=customXml/itemProps2.xml><?xml version="1.0" encoding="utf-8"?>
-<ds:datastoreItem xmlns:ds="http://schemas.openxmlformats.org/officeDocument/2006/customXml" ds:itemID="{33EC375F-F377-4CDC-ADF0-CC8811D177D6}">
-  <ds:schemaRefs>
-    <ds:schemaRef ds:uri="http://schemas.microsoft.com/office/2006/metadata/properties"/>
-    <ds:schemaRef ds:uri="http://schemas.microsoft.com/office/infopath/2007/PartnerControls"/>
-    <ds:schemaRef ds:uri="71af3243-3dd4-4a8d-8c0d-dd76da1f02a5"/>
-  </ds:schemaRefs>
-</ds:datastoreItem>
-</file>
-
-<file path=customXml/itemProps3.xml><?xml version="1.0" encoding="utf-8"?>
-<ds:datastoreItem xmlns:ds="http://schemas.openxmlformats.org/officeDocument/2006/customXml" ds:itemID="{661A1251-DA89-493A-8204-679220DD13D9}">
-  <ds:schemaRefs>
-    <ds:schemaRef ds:uri="http://schemas.microsoft.com/sharepoint/v3/contenttype/forms"/>
-  </ds:schemaRefs>
-</ds:datastoreItem>
 </file>
--- a/Medical_Charges_Presentation.pptx
+++ b/Medical_Charges_Presentation.pptx
@@ -179,12 +179,12 @@
   <pc:docChgLst>
     <pc:chgData name="Khethiwe Dlamini" userId="2bf6d97d3a4d60df" providerId="LiveId" clId="{9FC59950-DFEB-445E-8864-062B647CD92D}"/>
     <pc:docChg chg="undo custSel addSld delSld modSld">
-      <pc:chgData name="Khethiwe Dlamini" userId="2bf6d97d3a4d60df" providerId="LiveId" clId="{9FC59950-DFEB-445E-8864-062B647CD92D}" dt="2026-03-02T09:37:59.853" v="4670" actId="20577"/>
+      <pc:chgData name="Khethiwe Dlamini" userId="2bf6d97d3a4d60df" providerId="LiveId" clId="{9FC59950-DFEB-445E-8864-062B647CD92D}" dt="2026-03-06T08:17:19.592" v="4735" actId="20577"/>
       <pc:docMkLst>
         <pc:docMk/>
       </pc:docMkLst>
       <pc:sldChg chg="delSp modSp mod">
-        <pc:chgData name="Khethiwe Dlamini" userId="2bf6d97d3a4d60df" providerId="LiveId" clId="{9FC59950-DFEB-445E-8864-062B647CD92D}" dt="2026-02-25T14:51:12.462" v="1224" actId="1038"/>
+        <pc:chgData name="Khethiwe Dlamini" userId="2bf6d97d3a4d60df" providerId="LiveId" clId="{9FC59950-DFEB-445E-8864-062B647CD92D}" dt="2026-03-06T08:17:19.592" v="4735" actId="20577"/>
         <pc:sldMkLst>
           <pc:docMk/>
           <pc:sldMk cId="3105940131" sldId="256"/>
@@ -195,6 +195,14 @@
             <pc:docMk/>
             <pc:sldMk cId="3105940131" sldId="256"/>
             <ac:spMk id="12" creationId="{485D1319-7BD4-47DE-B3DF-55B655BB34C4}"/>
+          </ac:spMkLst>
+        </pc:spChg>
+        <pc:spChg chg="mod">
+          <ac:chgData name="Khethiwe Dlamini" userId="2bf6d97d3a4d60df" providerId="LiveId" clId="{9FC59950-DFEB-445E-8864-062B647CD92D}" dt="2026-03-06T08:17:19.592" v="4735" actId="20577"/>
+          <ac:spMkLst>
+            <pc:docMk/>
+            <pc:sldMk cId="3105940131" sldId="256"/>
+            <ac:spMk id="13" creationId="{DAD3AC05-2DFE-4FEA-BD0F-67495472A283}"/>
           </ac:spMkLst>
         </pc:spChg>
         <pc:spChg chg="mod">
@@ -342,7 +350,7 @@
         </pc:spChg>
       </pc:sldChg>
       <pc:sldChg chg="addSp delSp modSp mod modNotesTx">
-        <pc:chgData name="Khethiwe Dlamini" userId="2bf6d97d3a4d60df" providerId="LiveId" clId="{9FC59950-DFEB-445E-8864-062B647CD92D}" dt="2026-02-26T09:27:19.516" v="4619" actId="20577"/>
+        <pc:chgData name="Khethiwe Dlamini" userId="2bf6d97d3a4d60df" providerId="LiveId" clId="{9FC59950-DFEB-445E-8864-062B647CD92D}" dt="2026-03-06T08:14:56.062" v="4685" actId="14100"/>
         <pc:sldMkLst>
           <pc:docMk/>
           <pc:sldMk cId="2044100319" sldId="261"/>
@@ -372,7 +380,7 @@
           </ac:spMkLst>
         </pc:spChg>
         <pc:spChg chg="add mod">
-          <ac:chgData name="Khethiwe Dlamini" userId="2bf6d97d3a4d60df" providerId="LiveId" clId="{9FC59950-DFEB-445E-8864-062B647CD92D}" dt="2026-02-26T09:27:19.516" v="4619" actId="20577"/>
+          <ac:chgData name="Khethiwe Dlamini" userId="2bf6d97d3a4d60df" providerId="LiveId" clId="{9FC59950-DFEB-445E-8864-062B647CD92D}" dt="2026-03-06T08:14:56.062" v="4685" actId="14100"/>
           <ac:spMkLst>
             <pc:docMk/>
             <pc:sldMk cId="2044100319" sldId="261"/>
@@ -404,7 +412,7 @@
           </ac:spMkLst>
         </pc:spChg>
         <pc:graphicFrameChg chg="add mod modGraphic">
-          <ac:chgData name="Khethiwe Dlamini" userId="2bf6d97d3a4d60df" providerId="LiveId" clId="{9FC59950-DFEB-445E-8864-062B647CD92D}" dt="2026-02-25T15:15:14.594" v="1787" actId="572"/>
+          <ac:chgData name="Khethiwe Dlamini" userId="2bf6d97d3a4d60df" providerId="LiveId" clId="{9FC59950-DFEB-445E-8864-062B647CD92D}" dt="2026-03-06T08:13:42.634" v="4680" actId="20577"/>
           <ac:graphicFrameMkLst>
             <pc:docMk/>
             <pc:sldMk cId="2044100319" sldId="261"/>
@@ -421,7 +429,7 @@
         </pc:picChg>
       </pc:sldChg>
       <pc:sldChg chg="addSp delSp modSp mod">
-        <pc:chgData name="Khethiwe Dlamini" userId="2bf6d97d3a4d60df" providerId="LiveId" clId="{9FC59950-DFEB-445E-8864-062B647CD92D}" dt="2026-02-25T16:50:52.437" v="3781" actId="207"/>
+        <pc:chgData name="Khethiwe Dlamini" userId="2bf6d97d3a4d60df" providerId="LiveId" clId="{9FC59950-DFEB-445E-8864-062B647CD92D}" dt="2026-03-06T08:16:16.691" v="4686" actId="20577"/>
         <pc:sldMkLst>
           <pc:docMk/>
           <pc:sldMk cId="686076518" sldId="265"/>
@@ -443,7 +451,7 @@
           </ac:spMkLst>
         </pc:spChg>
         <pc:spChg chg="mod">
-          <ac:chgData name="Khethiwe Dlamini" userId="2bf6d97d3a4d60df" providerId="LiveId" clId="{9FC59950-DFEB-445E-8864-062B647CD92D}" dt="2026-02-25T16:50:40.584" v="3779" actId="20577"/>
+          <ac:chgData name="Khethiwe Dlamini" userId="2bf6d97d3a4d60df" providerId="LiveId" clId="{9FC59950-DFEB-445E-8864-062B647CD92D}" dt="2026-03-06T08:16:16.691" v="4686" actId="20577"/>
           <ac:spMkLst>
             <pc:docMk/>
             <pc:sldMk cId="686076518" sldId="265"/>
@@ -676,14 +684,6 @@
             <ac:spMk id="3" creationId="{902F5DBA-7530-EDEB-54AA-0F675ADECEFD}"/>
           </ac:spMkLst>
         </pc:spChg>
-        <pc:spChg chg="del">
-          <ac:chgData name="Khethiwe Dlamini" userId="2bf6d97d3a4d60df" providerId="LiveId" clId="{9FC59950-DFEB-445E-8864-062B647CD92D}" dt="2026-03-02T09:33:44.415" v="4634" actId="478"/>
-          <ac:spMkLst>
-            <pc:docMk/>
-            <pc:sldMk cId="95872969" sldId="275"/>
-            <ac:spMk id="4" creationId="{BFD91BB7-1069-D294-F0B8-6702E2715F57}"/>
-          </ac:spMkLst>
-        </pc:spChg>
         <pc:spChg chg="mod">
           <ac:chgData name="Khethiwe Dlamini" userId="2bf6d97d3a4d60df" providerId="LiveId" clId="{9FC59950-DFEB-445E-8864-062B647CD92D}" dt="2026-03-02T09:33:32.546" v="4630" actId="20577"/>
           <ac:spMkLst>
@@ -692,30 +692,6 @@
             <ac:spMk id="5" creationId="{F505899D-D513-8B68-1671-9882BB37A835}"/>
           </ac:spMkLst>
         </pc:spChg>
-        <pc:spChg chg="add">
-          <ac:chgData name="Khethiwe Dlamini" userId="2bf6d97d3a4d60df" providerId="LiveId" clId="{9FC59950-DFEB-445E-8864-062B647CD92D}" dt="2026-03-02T09:36:23.378" v="4635"/>
-          <ac:spMkLst>
-            <pc:docMk/>
-            <pc:sldMk cId="95872969" sldId="275"/>
-            <ac:spMk id="6" creationId="{CC6740EE-0AC5-E2DB-A73B-CF9D838BC440}"/>
-          </ac:spMkLst>
-        </pc:spChg>
-        <pc:spChg chg="add del mod">
-          <ac:chgData name="Khethiwe Dlamini" userId="2bf6d97d3a4d60df" providerId="LiveId" clId="{9FC59950-DFEB-445E-8864-062B647CD92D}" dt="2026-03-02T09:36:44.796" v="4640"/>
-          <ac:spMkLst>
-            <pc:docMk/>
-            <pc:sldMk cId="95872969" sldId="275"/>
-            <ac:spMk id="7" creationId="{AB248872-BA30-34B2-E401-C153B6BC6C0F}"/>
-          </ac:spMkLst>
-        </pc:spChg>
-        <pc:picChg chg="del">
-          <ac:chgData name="Khethiwe Dlamini" userId="2bf6d97d3a4d60df" providerId="LiveId" clId="{9FC59950-DFEB-445E-8864-062B647CD92D}" dt="2026-03-02T09:33:34.283" v="4631" actId="478"/>
-          <ac:picMkLst>
-            <pc:docMk/>
-            <pc:sldMk cId="95872969" sldId="275"/>
-            <ac:picMk id="5126" creationId="{120746E5-4652-E13E-BA3A-17CE21155818}"/>
-          </ac:picMkLst>
-        </pc:picChg>
       </pc:sldChg>
     </pc:docChg>
   </pc:docChgLst>
@@ -816,7 +792,7 @@
           <a:p>
             <a:fld id="{24EEDC24-AEF3-4156-91F4-FB474A5F24DB}" type="datetimeFigureOut">
               <a:rPr lang="en-US" smtClean="0"/>
-              <a:t>3/2/2026</a:t>
+              <a:t>3/6/2026</a:t>
             </a:fld>
             <a:endParaRPr lang="en-US" dirty="0"/>
           </a:p>
@@ -993,7 +969,7 @@
           <a:p>
             <a:fld id="{253023A0-2B54-4E79-AA20-143385AB9A6C}" type="datetimeFigureOut">
               <a:rPr lang="en-US" smtClean="0"/>
-              <a:t>3/2/2026</a:t>
+              <a:t>3/6/2026</a:t>
             </a:fld>
             <a:endParaRPr lang="en-US" dirty="0"/>
           </a:p>
@@ -4676,7 +4652,25 @@
                 </a:solidFill>
                 <a:latin typeface="+mj-lt"/>
               </a:rPr>
-              <a:t>Analysis of Health-Related Factors and Their Impact on Medical Insurance Costs</a:t>
+              <a:t>Comparison of Regression </a:t>
+            </a:r>
+            <a:r>
+              <a:rPr lang="en-US" sz="2400">
+                <a:solidFill>
+                  <a:schemeClr val="bg1"/>
+                </a:solidFill>
+                <a:latin typeface="+mj-lt"/>
+              </a:rPr>
+              <a:t>Models in </a:t>
+            </a:r>
+            <a:r>
+              <a:rPr lang="en-US" sz="2400" dirty="0">
+                <a:solidFill>
+                  <a:schemeClr val="bg1"/>
+                </a:solidFill>
+                <a:latin typeface="+mj-lt"/>
+              </a:rPr>
+              <a:t>Predicting Medical Insurance Costs</a:t>
             </a:r>
           </a:p>
         </p:txBody>
@@ -5249,7 +5243,7 @@
                 </a:solidFill>
                 <a:latin typeface="+mj-lt"/>
               </a:rPr>
-              <a:t>THANK YOU</a:t>
+              <a:t>THANK YOU!</a:t>
             </a:r>
           </a:p>
         </p:txBody>
@@ -7165,7 +7159,7 @@
           <p:nvPr>
             <p:extLst>
               <p:ext uri="{D42A27DB-BD31-4B8C-83A1-F6EECF244321}">
-                <p14:modId xmlns:p14="http://schemas.microsoft.com/office/powerpoint/2010/main" val="3057328632"/>
+                <p14:modId xmlns:p14="http://schemas.microsoft.com/office/powerpoint/2010/main" val="2415670796"/>
               </p:ext>
             </p:extLst>
           </p:nvPr>
@@ -7651,7 +7645,7 @@
                     <a:p>
                       <a:r>
                         <a:rPr lang="en-GB" sz="1600" dirty="0"/>
-                        <a:t>Age, Sex, BMI, Children, Smoker Status, Region, Charges</a:t>
+                        <a:t>Age, Sex, BMI, Number of Children, Smoker Status, Region, Charges</a:t>
                       </a:r>
                       <a:endParaRPr lang="en-ZA" sz="1600" dirty="0"/>
                     </a:p>
@@ -7946,8 +7940,8 @@
         </p:nvSpPr>
         <p:spPr>
           <a:xfrm>
-            <a:off x="815383" y="4788310"/>
-            <a:ext cx="5043814" cy="1546953"/>
+            <a:off x="815383" y="4788311"/>
+            <a:ext cx="5043814" cy="1219200"/>
           </a:xfrm>
           <a:prstGeom prst="round2DiagRect">
             <a:avLst/>
@@ -7978,36 +7972,6 @@
         <p:txBody>
           <a:bodyPr rtlCol="0" anchor="ctr"/>
           <a:lstStyle/>
-          <a:p>
-            <a:pPr marL="285750" indent="-285750">
-              <a:buFont typeface="Wingdings" panose="05000000000000000000" pitchFamily="2" charset="2"/>
-              <a:buChar char="v"/>
-            </a:pPr>
-            <a:r>
-              <a:rPr lang="en-GB" sz="1400" dirty="0">
-                <a:solidFill>
-                  <a:srgbClr val="003300"/>
-                </a:solidFill>
-              </a:rPr>
-              <a:t>Given the high quality of the data, the only preprocessing required </a:t>
-            </a:r>
-            <a:r>
-              <a:rPr lang="en-GB" sz="1400">
-                <a:solidFill>
-                  <a:srgbClr val="003300"/>
-                </a:solidFill>
-              </a:rPr>
-              <a:t>was one-hot </a:t>
-            </a:r>
-            <a:r>
-              <a:rPr lang="en-GB" sz="1400" dirty="0">
-                <a:solidFill>
-                  <a:srgbClr val="003300"/>
-                </a:solidFill>
-              </a:rPr>
-              <a:t>encoding categorical variables</a:t>
-            </a:r>
-          </a:p>
           <a:p>
             <a:pPr marL="285750" indent="-285750">
               <a:buFont typeface="Wingdings" panose="05000000000000000000" pitchFamily="2" charset="2"/>
@@ -14795,6 +14759,23 @@
 </file>
 
 <file path=customXml/item1.xml><?xml version="1.0" encoding="utf-8"?>
+<?mso-contentType ?>
+<FormTemplates xmlns="http://schemas.microsoft.com/sharepoint/v3/contenttype/forms">
+  <Display>DocumentLibraryForm</Display>
+  <Edit>DocumentLibraryForm</Edit>
+  <New>DocumentLibraryForm</New>
+</FormTemplates>
+</file>
+
+<file path=customXml/item2.xml><?xml version="1.0" encoding="utf-8"?>
+<p:properties xmlns:p="http://schemas.microsoft.com/office/2006/metadata/properties" xmlns:xsi="http://www.w3.org/2001/XMLSchema-instance" xmlns:pc="http://schemas.microsoft.com/office/infopath/2007/PartnerControls">
+  <documentManagement>
+    <MediaServiceKeyPoints xmlns="71af3243-3dd4-4a8d-8c0d-dd76da1f02a5" xsi:nil="true"/>
+  </documentManagement>
+</p:properties>
+</file>
+
+<file path=customXml/item3.xml><?xml version="1.0" encoding="utf-8"?>
 <ct:contentTypeSchema xmlns:ct="http://schemas.microsoft.com/office/2006/metadata/contentType" xmlns:ma="http://schemas.microsoft.com/office/2006/metadata/properties/metaAttributes" ct:_="" ma:_="" ma:contentTypeName="Document" ma:contentTypeID="0x01010079F111ED35F8CC479449609E8A0923A6" ma:contentTypeVersion="11" ma:contentTypeDescription="Create a new document." ma:contentTypeScope="" ma:versionID="9677210f24a1be23c92c90fd886aa0aa">
   <xsd:schema xmlns:xsd="http://www.w3.org/2001/XMLSchema" xmlns:xs="http://www.w3.org/2001/XMLSchema" xmlns:p="http://schemas.microsoft.com/office/2006/metadata/properties" xmlns:ns2="71af3243-3dd4-4a8d-8c0d-dd76da1f02a5" xmlns:ns3="16c05727-aa75-4e4a-9b5f-8a80a1165891" targetNamespace="http://schemas.microsoft.com/office/2006/metadata/properties" ma:root="true" ma:fieldsID="60e05723c5c1908df1a1a4ebf11d344e" ns2:_="" ns3:_="">
     <xsd:import namespace="71af3243-3dd4-4a8d-8c0d-dd76da1f02a5"/>
@@ -15005,38 +14986,10 @@
 </ct:contentTypeSchema>
 </file>
 
-<file path=customXml/item2.xml><?xml version="1.0" encoding="utf-8"?>
-<p:properties xmlns:p="http://schemas.microsoft.com/office/2006/metadata/properties" xmlns:xsi="http://www.w3.org/2001/XMLSchema-instance" xmlns:pc="http://schemas.microsoft.com/office/infopath/2007/PartnerControls">
-  <documentManagement>
-    <MediaServiceKeyPoints xmlns="71af3243-3dd4-4a8d-8c0d-dd76da1f02a5" xsi:nil="true"/>
-  </documentManagement>
-</p:properties>
-</file>
-
-<file path=customXml/item3.xml><?xml version="1.0" encoding="utf-8"?>
-<?mso-contentType ?>
-<FormTemplates xmlns="http://schemas.microsoft.com/sharepoint/v3/contenttype/forms">
-  <Display>DocumentLibraryForm</Display>
-  <Edit>DocumentLibraryForm</Edit>
-  <New>DocumentLibraryForm</New>
-</FormTemplates>
-</file>
-
 <file path=customXml/itemProps1.xml><?xml version="1.0" encoding="utf-8"?>
-<ds:datastoreItem xmlns:ds="http://schemas.openxmlformats.org/officeDocument/2006/customXml" ds:itemID="{D1B0ABC2-BF39-4F70-A7AD-9DFBD1D27268}">
+<ds:datastoreItem xmlns:ds="http://schemas.openxmlformats.org/officeDocument/2006/customXml" ds:itemID="{661A1251-DA89-493A-8204-679220DD13D9}">
   <ds:schemaRefs>
-    <ds:schemaRef ds:uri="http://schemas.microsoft.com/office/2006/metadata/contentType"/>
-    <ds:schemaRef ds:uri="http://schemas.microsoft.com/office/2006/metadata/properties/metaAttributes"/>
-    <ds:schemaRef ds:uri="http://www.w3.org/2001/XMLSchema"/>
-    <ds:schemaRef ds:uri="http://schemas.microsoft.com/office/2006/metadata/properties"/>
-    <ds:schemaRef ds:uri="71af3243-3dd4-4a8d-8c0d-dd76da1f02a5"/>
-    <ds:schemaRef ds:uri="16c05727-aa75-4e4a-9b5f-8a80a1165891"/>
-    <ds:schemaRef ds:uri="http://schemas.microsoft.com/office/2006/documentManagement/types"/>
-    <ds:schemaRef ds:uri="http://schemas.microsoft.com/office/infopath/2007/PartnerControls"/>
-    <ds:schemaRef ds:uri="http://schemas.openxmlformats.org/package/2006/metadata/core-properties"/>
-    <ds:schemaRef ds:uri="http://purl.org/dc/elements/1.1/"/>
-    <ds:schemaRef ds:uri="http://purl.org/dc/terms/"/>
-    <ds:schemaRef ds:uri="http://schemas.microsoft.com/internal/obd"/>
+    <ds:schemaRef ds:uri="http://schemas.microsoft.com/sharepoint/v3/contenttype/forms"/>
   </ds:schemaRefs>
 </ds:datastoreItem>
 </file>
@@ -15059,9 +15012,20 @@
 </file>
 
 <file path=customXml/itemProps3.xml><?xml version="1.0" encoding="utf-8"?>
-<ds:datastoreItem xmlns:ds="http://schemas.openxmlformats.org/officeDocument/2006/customXml" ds:itemID="{661A1251-DA89-493A-8204-679220DD13D9}">
+<ds:datastoreItem xmlns:ds="http://schemas.openxmlformats.org/officeDocument/2006/customXml" ds:itemID="{D1B0ABC2-BF39-4F70-A7AD-9DFBD1D27268}">
   <ds:schemaRefs>
-    <ds:schemaRef ds:uri="http://schemas.microsoft.com/sharepoint/v3/contenttype/forms"/>
+    <ds:schemaRef ds:uri="http://schemas.microsoft.com/office/2006/metadata/contentType"/>
+    <ds:schemaRef ds:uri="http://schemas.microsoft.com/office/2006/metadata/properties/metaAttributes"/>
+    <ds:schemaRef ds:uri="http://www.w3.org/2001/XMLSchema"/>
+    <ds:schemaRef ds:uri="http://schemas.microsoft.com/office/2006/metadata/properties"/>
+    <ds:schemaRef ds:uri="71af3243-3dd4-4a8d-8c0d-dd76da1f02a5"/>
+    <ds:schemaRef ds:uri="16c05727-aa75-4e4a-9b5f-8a80a1165891"/>
+    <ds:schemaRef ds:uri="http://schemas.microsoft.com/office/2006/documentManagement/types"/>
+    <ds:schemaRef ds:uri="http://schemas.microsoft.com/office/infopath/2007/PartnerControls"/>
+    <ds:schemaRef ds:uri="http://schemas.openxmlformats.org/package/2006/metadata/core-properties"/>
+    <ds:schemaRef ds:uri="http://purl.org/dc/elements/1.1/"/>
+    <ds:schemaRef ds:uri="http://purl.org/dc/terms/"/>
+    <ds:schemaRef ds:uri="http://schemas.microsoft.com/internal/obd"/>
   </ds:schemaRefs>
 </ds:datastoreItem>
 </file>